--- a/Slides/Semana 6/semana_6_slides.pptx
+++ b/Slides/Semana 6/semana_6_slides.pptx
@@ -21,9 +21,10 @@
     <p:sldId id="269" r:id="rId15"/>
     <p:sldId id="270" r:id="rId16"/>
     <p:sldId id="271" r:id="rId17"/>
+    <p:sldId id="272" r:id="rId18"/>
   </p:sldIdLst>
   <p:notesMasterIdLst>
-    <p:notesMasterId r:id="rId18"/>
+    <p:notesMasterId r:id="rId19"/>
   </p:notesMasterIdLst>
   <p:sldSz cx="12192000" cy="6858000"/>
   <p:notesSz cx="6858000" cy="12192000"/>
@@ -605,7 +606,7 @@
           <a:p>
             <a:r>
               <a:rPr lang="en-US" dirty="0"/>
-              <a:t>Notas: Deixar claro que baixar textura pronta NÃO isenta de entender o seamless. Se o estudante baixa do Poly Haven, precisa documentar por que é seamless (apontar continuidade de bordas no Wrap Around) e adaptar cor/detalhe ao tema. "Baixar é válido. Entregar sem entender não é." Erro comum nº 6 do plano. Se a internet do lab for instável, ter um pen drive com 5-6 texturas preparadas.</a:t>
+              <a:t>Notas: Núcleo procedimental da semana. O ciclo Krita -&gt; Blender vai se repetir várias vezes no estúdio — é normal. Reforçar o loop C-&gt;D-&gt;C: verificar no Wrap Around, voltar ao patch se houver costura. O GitHub Action converte o bloco mermaid em imagem automaticamente.</a:t>
             </a:r>
             <a:endParaRPr lang="en-US" dirty="0"/>
           </a:p>
@@ -693,7 +694,7 @@
           <a:p>
             <a:r>
               <a:rPr lang="en-US" dirty="0"/>
-              <a:t>Notas: Erro comum nº 5. Escala não é problema do seamless — é de mapeamento. Adicionar nó Mapping (Shift+A &gt; Vector &gt; Mapping) entre Texture Coordinate e Image Texture, ajustar Scale em X e Y. Referência física: uma pedra de parede medieval tem 20-40 cm — quanto isso é em relação ao Asset 01?</a:t>
+              <a:t>Notas: Deixar claro que baixar textura pronta NÃO isenta de entender o seamless. Se o estudante baixa do Poly Haven, precisa documentar por que é seamless (apontar continuidade de bordas no Wrap Around) e adaptar cor/detalhe ao tema. "Baixar é válido. Entregar sem entender não é." Erro comum nº 6 do plano. Se a internet do lab for instável, ter um pen drive com 5-6 texturas preparadas.</a:t>
             </a:r>
             <a:endParaRPr lang="en-US" dirty="0"/>
           </a:p>
@@ -781,7 +782,7 @@
           <a:p>
             <a:r>
               <a:rPr lang="en-US" dirty="0"/>
-              <a:t>Notas: Erro comum recorrente. Ao adicionar o Image Texture, o estudante às vezes desfaz outros inputs. Verificar no Principled BSDF: Base Color conectado ao Image Texture, Metallic e Roughness com valores não-padrão coerentes com o material (ex: o Roughness 0.85 da pedra calibrado na Semana 5 continua lá?).</a:t>
+              <a:t>Notas: Erro comum nº 5. Escala não é problema do seamless — é de mapeamento. Adicionar nó Mapping (Shift+A &gt; Vector &gt; Mapping) entre Texture Coordinate e Image Texture, ajustar Scale em X e Y. Referência física: uma pedra de parede medieval tem 20-40 cm — quanto isso é em relação ao Asset 01?</a:t>
             </a:r>
             <a:endParaRPr lang="en-US" dirty="0"/>
           </a:p>
@@ -869,7 +870,7 @@
           <a:p>
             <a:r>
               <a:rPr lang="en-US" dirty="0"/>
-              <a:t>Notas: Os três erros mais frequentes da semana, alinhados ao bloco de dificuldades do plano. Circular no estúdio caçando exatamente estes padrões. Para a sombra dura: orientar imagens de dia nublado / iluminação difusa; se a sombra for leve, suavizar com Dodge/Burn ou níveis antes do offset.</a:t>
+              <a:t>Notas: Erro comum recorrente. Ao adicionar o Image Texture, o estudante às vezes desfaz outros inputs. Verificar no Principled BSDF: Base Color conectado ao Image Texture, Metallic e Roughness com valores não-padrão coerentes com o material (ex: o Roughness 0.85 da pedra calibrado na Semana 5 continua lá?).</a:t>
             </a:r>
             <a:endParaRPr lang="en-US" dirty="0"/>
           </a:p>
@@ -957,7 +958,7 @@
           <a:p>
             <a:r>
               <a:rPr lang="en-US" dirty="0"/>
-              <a:t>Notas: Amarrar a mini aula. Cada item retorna na demonstração e no estúdio. Não reler tudo — apontar a conexão com a demo (pedra seamless no Krita -&gt; Blender). Lembrar: hoje é crítica INFORMAL; o foco é ler costura e coerência temática no trabalho dos colegas.</a:t>
+              <a:t>Notas: Os três erros mais frequentes da semana, alinhados ao bloco de dificuldades do plano. Circular no estúdio caçando exatamente estes padrões. Para a sombra dura: orientar imagens de dia nublado / iluminação difusa; se a sombra for leve, suavizar com Dodge/Burn ou níveis antes do offset.</a:t>
             </a:r>
             <a:endParaRPr lang="en-US" dirty="0"/>
           </a:p>
@@ -1045,7 +1046,7 @@
           <a:p>
             <a:r>
               <a:rPr lang="en-US" dirty="0"/>
-              <a:t>Notas: Consigna do estúdio (50 min). Se o Asset 01 é parede de pedra medieval, a textura é pedra; se é caixa de metal Sci-Fi, é metal com ferrugem. Amarrar ao moodboard: não é "pedra genérica", é AQUELA pedra do tema. Nomenclatura: [Nome]_[material]_seamless_S06.png. Salvar o .kra nativo com as camadas — vai poupar trabalho na Semana 7.</a:t>
+              <a:t>Notas: Amarrar a mini aula. Cada item retorna na demonstração e no estúdio. Não reler tudo — apontar a conexão com a demo (pedra seamless no Krita -&gt; Blender). Lembrar: hoje é crítica INFORMAL; o foco é ler costura e coerência temática no trabalho dos colegas.</a:t>
             </a:r>
             <a:endParaRPr lang="en-US" dirty="0"/>
           </a:p>
@@ -1088,6 +1089,94 @@
 </file>
 
 <file path=ppt/notesSlides/notesSlide16.xml><?xml version="1.0" encoding="utf-8"?>
+<p:notes xmlns:a="http://schemas.openxmlformats.org/drawingml/2006/main" xmlns:r="http://schemas.openxmlformats.org/officeDocument/2006/relationships" xmlns:p="http://schemas.openxmlformats.org/presentationml/2006/main">
+  <p:cSld>
+    <p:spTree>
+      <p:nvGrpSpPr>
+        <p:cNvPr id="1" name=""/>
+        <p:cNvGrpSpPr/>
+        <p:nvPr/>
+      </p:nvGrpSpPr>
+      <p:grpSpPr>
+        <a:xfrm>
+          <a:off x="0" y="0"/>
+          <a:ext cx="0" cy="0"/>
+          <a:chOff x="0" y="0"/>
+          <a:chExt cx="0" cy="0"/>
+        </a:xfrm>
+      </p:grpSpPr>
+      <p:sp>
+        <p:nvSpPr>
+          <p:cNvPr id="2" name="Slide Image Placeholder 1"/>
+          <p:cNvSpPr>
+            <a:spLocks noGrp="1" noRot="1" noChangeAspect="1"/>
+          </p:cNvSpPr>
+          <p:nvPr>
+            <p:ph type="sldImg"/>
+          </p:nvPr>
+        </p:nvSpPr>
+        <p:spPr/>
+      </p:sp>
+      <p:sp>
+        <p:nvSpPr>
+          <p:cNvPr id="3" name="Notes Placeholder 2"/>
+          <p:cNvSpPr>
+            <a:spLocks noGrp="1"/>
+          </p:cNvSpPr>
+          <p:nvPr>
+            <p:ph type="body" idx="1"/>
+          </p:nvPr>
+        </p:nvSpPr>
+        <p:spPr/>
+        <p:txBody>
+          <a:bodyPr/>
+          <a:lstStyle/>
+          <a:p>
+            <a:r>
+              <a:rPr lang="en-US" dirty="0"/>
+              <a:t>Notas: Consigna do estúdio (50 min). Se o Asset 01 é parede de pedra medieval, a textura é pedra; se é caixa de metal Sci-Fi, é metal com ferrugem. Amarrar ao moodboard: não é "pedra genérica", é AQUELA pedra do tema. Nomenclatura: [Nome]_[material]_seamless_S06.png. Salvar o .kra nativo com as camadas — vai poupar trabalho na Semana 7.</a:t>
+            </a:r>
+            <a:endParaRPr lang="en-US" dirty="0"/>
+          </a:p>
+        </p:txBody>
+      </p:sp>
+      <p:sp>
+        <p:nvSpPr>
+          <p:cNvPr id="4" name="Slide Number Placeholder 3"/>
+          <p:cNvSpPr>
+            <a:spLocks noGrp="1"/>
+          </p:cNvSpPr>
+          <p:nvPr>
+            <p:ph type="sldNum" sz="quarter" idx="10"/>
+          </p:nvPr>
+        </p:nvSpPr>
+        <p:spPr/>
+        <p:txBody>
+          <a:bodyPr/>
+          <a:lstStyle/>
+          <a:p>
+            <a:fld id="{F7021451-1387-4CA6-816F-3879F97B5CBC}" type="slidenum">
+              <a:rPr lang="en-US"/>
+              <a:t>16</a:t>
+            </a:fld>
+            <a:endParaRPr lang="en-US"/>
+          </a:p>
+        </p:txBody>
+      </p:sp>
+    </p:spTree>
+    <p:extLst>
+      <p:ext uri="{BB962C8B-B14F-4D97-AF65-F5344CB8AC3E}">
+        <p14:creationId xmlns:p14="http://schemas.microsoft.com/office/powerpoint/2010/main" val="1024086991"/>
+      </p:ext>
+    </p:extLst>
+  </p:cSld>
+  <p:clrMapOvr>
+    <a:masterClrMapping/>
+  </p:clrMapOvr>
+</p:notes>
+</file>
+
+<file path=ppt/notesSlides/notesSlide17.xml><?xml version="1.0" encoding="utf-8"?>
 <p:notes xmlns:a="http://schemas.openxmlformats.org/drawingml/2006/main" xmlns:r="http://schemas.openxmlformats.org/officeDocument/2006/relationships" xmlns:p="http://schemas.openxmlformats.org/presentationml/2006/main">
   <p:cSld>
     <p:spTree>
@@ -1161,7 +1250,7 @@
           <a:p>
             <a:fld id="{F7021451-1387-4CA6-816F-3879F97B5CBC}" type="slidenum">
               <a:rPr lang="en-US"/>
-              <a:t>16</a:t>
+              <a:t>17</a:t>
             </a:fld>
             <a:endParaRPr lang="en-US"/>
           </a:p>
@@ -1269,6 +1358,94 @@
 </file>
 
 <file path=ppt/notesSlides/notesSlide3.xml><?xml version="1.0" encoding="utf-8"?>
+<p:notes xmlns:a="http://schemas.openxmlformats.org/drawingml/2006/main" xmlns:r="http://schemas.openxmlformats.org/officeDocument/2006/relationships" xmlns:p="http://schemas.openxmlformats.org/presentationml/2006/main">
+  <p:cSld>
+    <p:spTree>
+      <p:nvGrpSpPr>
+        <p:cNvPr id="1" name=""/>
+        <p:cNvGrpSpPr/>
+        <p:nvPr/>
+      </p:nvGrpSpPr>
+      <p:grpSpPr>
+        <a:xfrm>
+          <a:off x="0" y="0"/>
+          <a:ext cx="0" cy="0"/>
+          <a:chOff x="0" y="0"/>
+          <a:chExt cx="0" cy="0"/>
+        </a:xfrm>
+      </p:grpSpPr>
+      <p:sp>
+        <p:nvSpPr>
+          <p:cNvPr id="2" name="Slide Image Placeholder 1"/>
+          <p:cNvSpPr>
+            <a:spLocks noGrp="1" noRot="1" noChangeAspect="1"/>
+          </p:cNvSpPr>
+          <p:nvPr>
+            <p:ph type="sldImg"/>
+          </p:nvPr>
+        </p:nvSpPr>
+        <p:spPr/>
+      </p:sp>
+      <p:sp>
+        <p:nvSpPr>
+          <p:cNvPr id="3" name="Notes Placeholder 2"/>
+          <p:cNvSpPr>
+            <a:spLocks noGrp="1"/>
+          </p:cNvSpPr>
+          <p:nvPr>
+            <p:ph type="body" idx="1"/>
+          </p:nvPr>
+        </p:nvSpPr>
+        <p:spPr/>
+        <p:txBody>
+          <a:bodyPr/>
+          <a:lstStyle/>
+          <a:p>
+            <a:r>
+              <a:rPr lang="en-US" dirty="0"/>
+              <a:t>Notas: Abertura da mini aula — os 5 primeiros minutos, antes de entrar no conteúdo novo de textura seamless. Mostrar rapidamente (ou descrever com uma imagem, se o add-on não estiver instalado no laboratório) a diferença de aproveitamento de espaço entre um Pack Islands nativo e um empacotamento via UVPackmaster no mesmo asset — reaproveitar o mesmo asset de demonstração da Semana 4, se possível. Não é essencial ter o add-on instalado: se indisponível, mencionar apenas verbalmente. Fechar com a pergunta do slide e seguir para o conteúdo novo da semana.</a:t>
+            </a:r>
+            <a:endParaRPr lang="en-US" dirty="0"/>
+          </a:p>
+        </p:txBody>
+      </p:sp>
+      <p:sp>
+        <p:nvSpPr>
+          <p:cNvPr id="4" name="Slide Number Placeholder 3"/>
+          <p:cNvSpPr>
+            <a:spLocks noGrp="1"/>
+          </p:cNvSpPr>
+          <p:nvPr>
+            <p:ph type="sldNum" sz="quarter" idx="10"/>
+          </p:nvPr>
+        </p:nvSpPr>
+        <p:spPr/>
+        <p:txBody>
+          <a:bodyPr/>
+          <a:lstStyle/>
+          <a:p>
+            <a:fld id="{F7021451-1387-4CA6-816F-3879F97B5CBC}" type="slidenum">
+              <a:rPr lang="en-US"/>
+              <a:t>3</a:t>
+            </a:fld>
+            <a:endParaRPr lang="en-US"/>
+          </a:p>
+        </p:txBody>
+      </p:sp>
+    </p:spTree>
+    <p:extLst>
+      <p:ext uri="{BB962C8B-B14F-4D97-AF65-F5344CB8AC3E}">
+        <p14:creationId xmlns:p14="http://schemas.microsoft.com/office/powerpoint/2010/main" val="1024086991"/>
+      </p:ext>
+    </p:extLst>
+  </p:cSld>
+  <p:clrMapOvr>
+    <a:masterClrMapping/>
+  </p:clrMapOvr>
+</p:notes>
+</file>
+
+<file path=ppt/notesSlides/notesSlide4.xml><?xml version="1.0" encoding="utf-8"?>
 <p:notes xmlns:a="http://schemas.openxmlformats.org/drawingml/2006/main" xmlns:r="http://schemas.openxmlformats.org/officeDocument/2006/relationships" xmlns:p="http://schemas.openxmlformats.org/presentationml/2006/main">
   <p:cSld>
     <p:spTree>
@@ -1342,7 +1519,7 @@
           <a:p>
             <a:fld id="{F7021451-1387-4CA6-816F-3879F97B5CBC}" type="slidenum">
               <a:rPr lang="en-US"/>
-              <a:t>3</a:t>
+              <a:t>4</a:t>
             </a:fld>
             <a:endParaRPr lang="en-US"/>
           </a:p>
@@ -1361,7 +1538,7 @@
 </p:notes>
 </file>
 
-<file path=ppt/notesSlides/notesSlide4.xml><?xml version="1.0" encoding="utf-8"?>
+<file path=ppt/notesSlides/notesSlide5.xml><?xml version="1.0" encoding="utf-8"?>
 <p:notes xmlns:a="http://schemas.openxmlformats.org/drawingml/2006/main" xmlns:r="http://schemas.openxmlformats.org/officeDocument/2006/relationships" xmlns:p="http://schemas.openxmlformats.org/presentationml/2006/main">
   <p:cSld>
     <p:spTree>
@@ -1430,7 +1607,7 @@
           <a:p>
             <a:fld id="{F7021451-1387-4CA6-816F-3879F97B5CBC}" type="slidenum">
               <a:rPr lang="en-US"/>
-              <a:t>4</a:t>
+              <a:t>5</a:t>
             </a:fld>
             <a:endParaRPr lang="en-US"/>
           </a:p>
@@ -1449,7 +1626,7 @@
 </p:notes>
 </file>
 
-<file path=ppt/notesSlides/notesSlide5.xml><?xml version="1.0" encoding="utf-8"?>
+<file path=ppt/notesSlides/notesSlide6.xml><?xml version="1.0" encoding="utf-8"?>
 <p:notes xmlns:a="http://schemas.openxmlformats.org/drawingml/2006/main" xmlns:r="http://schemas.openxmlformats.org/officeDocument/2006/relationships" xmlns:p="http://schemas.openxmlformats.org/presentationml/2006/main">
   <p:cSld>
     <p:spTree>
@@ -1518,7 +1695,7 @@
           <a:p>
             <a:fld id="{F7021451-1387-4CA6-816F-3879F97B5CBC}" type="slidenum">
               <a:rPr lang="en-US"/>
-              <a:t>5</a:t>
+              <a:t>6</a:t>
             </a:fld>
             <a:endParaRPr lang="en-US"/>
           </a:p>
@@ -1537,7 +1714,7 @@
 </p:notes>
 </file>
 
-<file path=ppt/notesSlides/notesSlide6.xml><?xml version="1.0" encoding="utf-8"?>
+<file path=ppt/notesSlides/notesSlide7.xml><?xml version="1.0" encoding="utf-8"?>
 <p:notes xmlns:a="http://schemas.openxmlformats.org/drawingml/2006/main" xmlns:r="http://schemas.openxmlformats.org/officeDocument/2006/relationships" xmlns:p="http://schemas.openxmlformats.org/presentationml/2006/main">
   <p:cSld>
     <p:spTree>
@@ -1611,7 +1788,7 @@
           <a:p>
             <a:fld id="{F7021451-1387-4CA6-816F-3879F97B5CBC}" type="slidenum">
               <a:rPr lang="en-US"/>
-              <a:t>6</a:t>
+              <a:t>7</a:t>
             </a:fld>
             <a:endParaRPr lang="en-US"/>
           </a:p>
@@ -1630,7 +1807,7 @@
 </p:notes>
 </file>
 
-<file path=ppt/notesSlides/notesSlide7.xml><?xml version="1.0" encoding="utf-8"?>
+<file path=ppt/notesSlides/notesSlide8.xml><?xml version="1.0" encoding="utf-8"?>
 <p:notes xmlns:a="http://schemas.openxmlformats.org/drawingml/2006/main" xmlns:r="http://schemas.openxmlformats.org/officeDocument/2006/relationships" xmlns:p="http://schemas.openxmlformats.org/presentationml/2006/main">
   <p:cSld>
     <p:spTree>
@@ -1699,7 +1876,7 @@
           <a:p>
             <a:fld id="{F7021451-1387-4CA6-816F-3879F97B5CBC}" type="slidenum">
               <a:rPr lang="en-US"/>
-              <a:t>7</a:t>
+              <a:t>8</a:t>
             </a:fld>
             <a:endParaRPr lang="en-US"/>
           </a:p>
@@ -1718,7 +1895,7 @@
 </p:notes>
 </file>
 
-<file path=ppt/notesSlides/notesSlide8.xml><?xml version="1.0" encoding="utf-8"?>
+<file path=ppt/notesSlides/notesSlide9.xml><?xml version="1.0" encoding="utf-8"?>
 <p:notes xmlns:a="http://schemas.openxmlformats.org/drawingml/2006/main" xmlns:r="http://schemas.openxmlformats.org/officeDocument/2006/relationships" xmlns:p="http://schemas.openxmlformats.org/presentationml/2006/main">
   <p:cSld>
     <p:spTree>
@@ -1770,94 +1947,6 @@
 Arquivo sugerido: assets/krita_wrap_around.webp
 Descrição: captura de tela do Krita com uma textura de pedra em modo Wrap Around ativo, exibindo a repetição em grade 3x3. Uma costura residual aparece destacada por um círculo vermelho anotado.
 Como produzir: no Krita, abrir uma textura de pedra parcialmente tratada, pressionar W para ativar o Wrap Around, dar zoom out até ver a repetição em grade. Capturar a tela e anotar a costura residual com um círculo no próprio Krita.</a:t>
-            </a:r>
-            <a:endParaRPr lang="en-US" dirty="0"/>
-          </a:p>
-        </p:txBody>
-      </p:sp>
-      <p:sp>
-        <p:nvSpPr>
-          <p:cNvPr id="4" name="Slide Number Placeholder 3"/>
-          <p:cNvSpPr>
-            <a:spLocks noGrp="1"/>
-          </p:cNvSpPr>
-          <p:nvPr>
-            <p:ph type="sldNum" sz="quarter" idx="10"/>
-          </p:nvPr>
-        </p:nvSpPr>
-        <p:spPr/>
-        <p:txBody>
-          <a:bodyPr/>
-          <a:lstStyle/>
-          <a:p>
-            <a:fld id="{F7021451-1387-4CA6-816F-3879F97B5CBC}" type="slidenum">
-              <a:rPr lang="en-US"/>
-              <a:t>8</a:t>
-            </a:fld>
-            <a:endParaRPr lang="en-US"/>
-          </a:p>
-        </p:txBody>
-      </p:sp>
-    </p:spTree>
-    <p:extLst>
-      <p:ext uri="{BB962C8B-B14F-4D97-AF65-F5344CB8AC3E}">
-        <p14:creationId xmlns:p14="http://schemas.microsoft.com/office/powerpoint/2010/main" val="1024086991"/>
-      </p:ext>
-    </p:extLst>
-  </p:cSld>
-  <p:clrMapOvr>
-    <a:masterClrMapping/>
-  </p:clrMapOvr>
-</p:notes>
-</file>
-
-<file path=ppt/notesSlides/notesSlide9.xml><?xml version="1.0" encoding="utf-8"?>
-<p:notes xmlns:a="http://schemas.openxmlformats.org/drawingml/2006/main" xmlns:r="http://schemas.openxmlformats.org/officeDocument/2006/relationships" xmlns:p="http://schemas.openxmlformats.org/presentationml/2006/main">
-  <p:cSld>
-    <p:spTree>
-      <p:nvGrpSpPr>
-        <p:cNvPr id="1" name=""/>
-        <p:cNvGrpSpPr/>
-        <p:nvPr/>
-      </p:nvGrpSpPr>
-      <p:grpSpPr>
-        <a:xfrm>
-          <a:off x="0" y="0"/>
-          <a:ext cx="0" cy="0"/>
-          <a:chOff x="0" y="0"/>
-          <a:chExt cx="0" cy="0"/>
-        </a:xfrm>
-      </p:grpSpPr>
-      <p:sp>
-        <p:nvSpPr>
-          <p:cNvPr id="2" name="Slide Image Placeholder 1"/>
-          <p:cNvSpPr>
-            <a:spLocks noGrp="1" noRot="1" noChangeAspect="1"/>
-          </p:cNvSpPr>
-          <p:nvPr>
-            <p:ph type="sldImg"/>
-          </p:nvPr>
-        </p:nvSpPr>
-        <p:spPr/>
-      </p:sp>
-      <p:sp>
-        <p:nvSpPr>
-          <p:cNvPr id="3" name="Notes Placeholder 2"/>
-          <p:cNvSpPr>
-            <a:spLocks noGrp="1"/>
-          </p:cNvSpPr>
-          <p:nvPr>
-            <p:ph type="body" idx="1"/>
-          </p:nvPr>
-        </p:nvSpPr>
-        <p:spPr/>
-        <p:txBody>
-          <a:bodyPr/>
-          <a:lstStyle/>
-          <a:p>
-            <a:r>
-              <a:rPr lang="en-US" dirty="0"/>
-              <a:t>Notas: Núcleo procedimental da semana. O ciclo Krita -&gt; Blender vai se repetir várias vezes no estúdio — é normal. Reforçar o loop C-&gt;D-&gt;C: verificar no Wrap Around, voltar ao patch se houver costura. O GitHub Action converte o bloco mermaid em imagem automaticamente.</a:t>
             </a:r>
             <a:endParaRPr lang="en-US" dirty="0"/>
           </a:p>
@@ -2482,6 +2571,45 @@
 <file path=ppt/slides/slide16.xml><?xml version="1.0" encoding="utf-8"?>
 <p:sld xmlns:a="http://schemas.openxmlformats.org/drawingml/2006/main" xmlns:r="http://schemas.openxmlformats.org/officeDocument/2006/relationships" xmlns:p="http://schemas.openxmlformats.org/presentationml/2006/main">
   <p:cSld name="Slide 16">
+    <p:bg>
+      <p:bgPr>
+        <a:blipFill dpi="0" rotWithShape="1">
+          <a:blip r:embed="rId1">
+            <a:lum/>
+          </a:blip>
+          <a:srcRect/>
+          <a:stretch>
+            <a:fillRect/>
+          </a:stretch>
+        </a:blipFill>
+        <a:effectLst/>
+      </p:bgPr>
+    </p:bg>
+    <p:spTree>
+      <p:nvGrpSpPr>
+        <p:cNvPr id="1" name=""/>
+        <p:cNvGrpSpPr/>
+        <p:nvPr/>
+      </p:nvGrpSpPr>
+      <p:grpSpPr>
+        <a:xfrm>
+          <a:off x="0" y="0"/>
+          <a:ext cx="0" cy="0"/>
+          <a:chOff x="0" y="0"/>
+          <a:chExt cx="0" cy="0"/>
+        </a:xfrm>
+      </p:grpSpPr>
+    </p:spTree>
+  </p:cSld>
+  <p:clrMapOvr>
+    <a:masterClrMapping/>
+  </p:clrMapOvr>
+</p:sld>
+</file>
+
+<file path=ppt/slides/slide17.xml><?xml version="1.0" encoding="utf-8"?>
+<p:sld xmlns:a="http://schemas.openxmlformats.org/drawingml/2006/main" xmlns:r="http://schemas.openxmlformats.org/officeDocument/2006/relationships" xmlns:p="http://schemas.openxmlformats.org/presentationml/2006/main">
+  <p:cSld name="Slide 17">
     <p:bg>
       <p:bgPr>
         <a:blipFill dpi="0" rotWithShape="1">

--- a/Slides/Semana 6/semana_6_slides.pptx
+++ b/Slides/Semana 6/semana_6_slides.pptx
@@ -22,9 +22,10 @@
     <p:sldId id="270" r:id="rId16"/>
     <p:sldId id="271" r:id="rId17"/>
     <p:sldId id="272" r:id="rId18"/>
+    <p:sldId id="273" r:id="rId19"/>
   </p:sldIdLst>
   <p:notesMasterIdLst>
-    <p:notesMasterId r:id="rId19"/>
+    <p:notesMasterId r:id="rId20"/>
   </p:notesMasterIdLst>
   <p:sldSz cx="12192000" cy="6858000"/>
   <p:notesSz cx="6858000" cy="12192000"/>
@@ -1046,7 +1047,7 @@
           <a:p>
             <a:r>
               <a:rPr lang="en-US" dirty="0"/>
-              <a:t>Notas: Amarrar a mini aula. Cada item retorna na demonstração e no estúdio. Não reler tudo — apontar a conexão com a demo (pedra seamless no Krita -&gt; Blender). Lembrar: hoje é crítica INFORMAL; o foco é ler costura e coerência temática no trabalho dos colegas.</a:t>
+              <a:t>Notas: Contextualizar o valor profissional. O uso de bibliotecas de textura scaneada é rotina em produção — a habilidade técnica cobrada do artista é curadoria, adaptação e correção de seams, não produção manual de tudo. Amarra à Semana 13/14: a mesma atenção a costura sem descontinuidade volta no tiling de trim sheets.</a:t>
             </a:r>
             <a:endParaRPr lang="en-US" dirty="0"/>
           </a:p>
@@ -1134,7 +1135,7 @@
           <a:p>
             <a:r>
               <a:rPr lang="en-US" dirty="0"/>
-              <a:t>Notas: Consigna do estúdio (50 min). Se o Asset 01 é parede de pedra medieval, a textura é pedra; se é caixa de metal Sci-Fi, é metal com ferrugem. Amarrar ao moodboard: não é "pedra genérica", é AQUELA pedra do tema. Nomenclatura: [Nome]_[material]_seamless_S06.png. Salvar o .kra nativo com as camadas — vai poupar trabalho na Semana 7.</a:t>
+              <a:t>Notas: Amarrar a mini aula. Cada item retorna na demonstração e no estúdio. Não reler tudo — apontar a conexão com a demo (pedra seamless no Krita -&gt; Blender). Lembrar: hoje é crítica INFORMAL; o foco é ler costura e coerência temática no trabalho dos colegas.</a:t>
             </a:r>
             <a:endParaRPr lang="en-US" dirty="0"/>
           </a:p>
@@ -1177,6 +1178,94 @@
 </file>
 
 <file path=ppt/notesSlides/notesSlide17.xml><?xml version="1.0" encoding="utf-8"?>
+<p:notes xmlns:a="http://schemas.openxmlformats.org/drawingml/2006/main" xmlns:r="http://schemas.openxmlformats.org/officeDocument/2006/relationships" xmlns:p="http://schemas.openxmlformats.org/presentationml/2006/main">
+  <p:cSld>
+    <p:spTree>
+      <p:nvGrpSpPr>
+        <p:cNvPr id="1" name=""/>
+        <p:cNvGrpSpPr/>
+        <p:nvPr/>
+      </p:nvGrpSpPr>
+      <p:grpSpPr>
+        <a:xfrm>
+          <a:off x="0" y="0"/>
+          <a:ext cx="0" cy="0"/>
+          <a:chOff x="0" y="0"/>
+          <a:chExt cx="0" cy="0"/>
+        </a:xfrm>
+      </p:grpSpPr>
+      <p:sp>
+        <p:nvSpPr>
+          <p:cNvPr id="2" name="Slide Image Placeholder 1"/>
+          <p:cNvSpPr>
+            <a:spLocks noGrp="1" noRot="1" noChangeAspect="1"/>
+          </p:cNvSpPr>
+          <p:nvPr>
+            <p:ph type="sldImg"/>
+          </p:nvPr>
+        </p:nvSpPr>
+        <p:spPr/>
+      </p:sp>
+      <p:sp>
+        <p:nvSpPr>
+          <p:cNvPr id="3" name="Notes Placeholder 2"/>
+          <p:cNvSpPr>
+            <a:spLocks noGrp="1"/>
+          </p:cNvSpPr>
+          <p:nvPr>
+            <p:ph type="body" idx="1"/>
+          </p:nvPr>
+        </p:nvSpPr>
+        <p:spPr/>
+        <p:txBody>
+          <a:bodyPr/>
+          <a:lstStyle/>
+          <a:p>
+            <a:r>
+              <a:rPr lang="en-US" dirty="0"/>
+              <a:t>Notas: Consigna do estúdio (50 min). Se o Asset 01 é parede de pedra medieval, a textura é pedra; se é caixa de metal Sci-Fi, é metal com ferrugem. Amarrar ao moodboard: não é "pedra genérica", é AQUELA pedra do tema. Nomenclatura: [Nome]_[material]_seamless_S06.png. Salvar o .kra nativo com as camadas — vai poupar trabalho na Semana 7.</a:t>
+            </a:r>
+            <a:endParaRPr lang="en-US" dirty="0"/>
+          </a:p>
+        </p:txBody>
+      </p:sp>
+      <p:sp>
+        <p:nvSpPr>
+          <p:cNvPr id="4" name="Slide Number Placeholder 3"/>
+          <p:cNvSpPr>
+            <a:spLocks noGrp="1"/>
+          </p:cNvSpPr>
+          <p:nvPr>
+            <p:ph type="sldNum" sz="quarter" idx="10"/>
+          </p:nvPr>
+        </p:nvSpPr>
+        <p:spPr/>
+        <p:txBody>
+          <a:bodyPr/>
+          <a:lstStyle/>
+          <a:p>
+            <a:fld id="{F7021451-1387-4CA6-816F-3879F97B5CBC}" type="slidenum">
+              <a:rPr lang="en-US"/>
+              <a:t>17</a:t>
+            </a:fld>
+            <a:endParaRPr lang="en-US"/>
+          </a:p>
+        </p:txBody>
+      </p:sp>
+    </p:spTree>
+    <p:extLst>
+      <p:ext uri="{BB962C8B-B14F-4D97-AF65-F5344CB8AC3E}">
+        <p14:creationId xmlns:p14="http://schemas.microsoft.com/office/powerpoint/2010/main" val="1024086991"/>
+      </p:ext>
+    </p:extLst>
+  </p:cSld>
+  <p:clrMapOvr>
+    <a:masterClrMapping/>
+  </p:clrMapOvr>
+</p:notes>
+</file>
+
+<file path=ppt/notesSlides/notesSlide18.xml><?xml version="1.0" encoding="utf-8"?>
 <p:notes xmlns:a="http://schemas.openxmlformats.org/drawingml/2006/main" xmlns:r="http://schemas.openxmlformats.org/officeDocument/2006/relationships" xmlns:p="http://schemas.openxmlformats.org/presentationml/2006/main">
   <p:cSld>
     <p:spTree>
@@ -1250,7 +1339,7 @@
           <a:p>
             <a:fld id="{F7021451-1387-4CA6-816F-3879F97B5CBC}" type="slidenum">
               <a:rPr lang="en-US"/>
-              <a:t>17</a:t>
+              <a:t>18</a:t>
             </a:fld>
             <a:endParaRPr lang="en-US"/>
           </a:p>
@@ -2610,6 +2699,45 @@
 <file path=ppt/slides/slide17.xml><?xml version="1.0" encoding="utf-8"?>
 <p:sld xmlns:a="http://schemas.openxmlformats.org/drawingml/2006/main" xmlns:r="http://schemas.openxmlformats.org/officeDocument/2006/relationships" xmlns:p="http://schemas.openxmlformats.org/presentationml/2006/main">
   <p:cSld name="Slide 17">
+    <p:bg>
+      <p:bgPr>
+        <a:blipFill dpi="0" rotWithShape="1">
+          <a:blip r:embed="rId1">
+            <a:lum/>
+          </a:blip>
+          <a:srcRect/>
+          <a:stretch>
+            <a:fillRect/>
+          </a:stretch>
+        </a:blipFill>
+        <a:effectLst/>
+      </p:bgPr>
+    </p:bg>
+    <p:spTree>
+      <p:nvGrpSpPr>
+        <p:cNvPr id="1" name=""/>
+        <p:cNvGrpSpPr/>
+        <p:nvPr/>
+      </p:nvGrpSpPr>
+      <p:grpSpPr>
+        <a:xfrm>
+          <a:off x="0" y="0"/>
+          <a:ext cx="0" cy="0"/>
+          <a:chOff x="0" y="0"/>
+          <a:chExt cx="0" cy="0"/>
+        </a:xfrm>
+      </p:grpSpPr>
+    </p:spTree>
+  </p:cSld>
+  <p:clrMapOvr>
+    <a:masterClrMapping/>
+  </p:clrMapOvr>
+</p:sld>
+</file>
+
+<file path=ppt/slides/slide18.xml><?xml version="1.0" encoding="utf-8"?>
+<p:sld xmlns:a="http://schemas.openxmlformats.org/drawingml/2006/main" xmlns:r="http://schemas.openxmlformats.org/officeDocument/2006/relationships" xmlns:p="http://schemas.openxmlformats.org/presentationml/2006/main">
+  <p:cSld name="Slide 18">
     <p:bg>
       <p:bgPr>
         <a:blipFill dpi="0" rotWithShape="1">
